--- a/docs/resources/slides/public/1sw-wk3-day3.pptx
+++ b/docs/resources/slides/public/1sw-wk3-day3.pptx
@@ -4417,7 +4417,7 @@
                 <a:ea typeface="Arial Black" pitchFamily="34" charset="-122"/>
                 <a:cs typeface="Arial Black" pitchFamily="34" charset="-120"/>
               </a:rPr>
-              <a:t>Four symbols, four screens</a:t>
+              <a:t>Wireframe symbols</a:t>
             </a:r>
             <a:endParaRPr lang="en-US" sz="4200" dirty="0"/>
           </a:p>
